--- a/lecons/LSA/Climatology/LSA_CLIM_L01_The_Meaning_and_Composition_of_the_Atmosphere.pptx
+++ b/lecons/LSA/Climatology/LSA_CLIM_L01_The_Meaning_and_Composition_of_the_Atmosphere.pptx
@@ -2841,7 +2841,7 @@
           <a:p>
             <a:r>
               <a:rPr lang="en-US" dirty="0"/>
-              <a:t>Let us copy Meaning of the Atmosphere. The atmosphere can be understood as follows. Write each point on a new line, with the key term first.</a:t>
+              <a:t>Let us copy Meaning of the Atmosphere. The atmosphere can be understood as follows. On this slide we have Atmosphere. Write each point on a new line, with the key term first, and explain it in your own words when we revise.</a:t>
             </a:r>
             <a:endParaRPr lang="en-US" dirty="0"/>
           </a:p>
@@ -2929,7 +2929,7 @@
           <a:p>
             <a:r>
               <a:rPr lang="en-US" dirty="0"/>
-              <a:t>Let us copy Composition of the Atmosphere. The atmosphere is made up of two main components. Write each point on a new line, with the key term first. When you finish, we go to the next slide.</a:t>
+              <a:t>Let us copy Composition of the Atmosphere. The atmosphere is made up of two main components. On this slide we have Gaseous components. Write each point on a new line, with the key term first, and explain it in your own words when we revise. When you finish, we go to the next slide.</a:t>
             </a:r>
             <a:endParaRPr lang="en-US" dirty="0"/>
           </a:p>
@@ -3017,7 +3017,7 @@
           <a:p>
             <a:r>
               <a:rPr lang="en-US" dirty="0"/>
-              <a:t>We continue with the same part. Write each point on a new line, with the key term first.</a:t>
+              <a:t>We continue with Composition of the Atmosphere. On this slide we have Aerosols. Write each point on a new line, with the key term first, and explain it in your own words when we revise.</a:t>
             </a:r>
             <a:endParaRPr lang="en-US" dirty="0"/>
           </a:p>
@@ -3105,7 +3105,7 @@
           <a:p>
             <a:r>
               <a:rPr lang="en-US" dirty="0"/>
-              <a:t>Let us copy Gaseous Components. The gaseous components of the atmosphere are of two types. Write each point on a new line, with the key term first. When you finish, we go to the next slide.</a:t>
+              <a:t>Let us copy Gaseous Components. The gaseous components of the atmosphere are of two types. On this slide we have Variable gases. Write each point on a new line, with the key term first, and explain it in your own words when we revise. When you finish, we go to the next slide.</a:t>
             </a:r>
             <a:endParaRPr lang="en-US" dirty="0"/>
           </a:p>
@@ -3193,7 +3193,7 @@
           <a:p>
             <a:r>
               <a:rPr lang="en-US" dirty="0"/>
-              <a:t>We continue with the same part. Write each point on a new line, with the key term first.</a:t>
+              <a:t>We continue with Gaseous Components. On this slide we have Constant gases. Write each point on a new line, with the key term first, and explain it in your own words when we revise.</a:t>
             </a:r>
             <a:endParaRPr lang="en-US" dirty="0"/>
           </a:p>
@@ -3369,7 +3369,7 @@
           <a:p>
             <a:r>
               <a:rPr lang="en-US" dirty="0"/>
-              <a:t>Let us copy Aerosols. The different types of aerosols include. Write each point on a new line, with the key term first. When you finish, we go to the next slide.</a:t>
+              <a:t>Let us copy Aerosols. The different types of aerosols include. On this slide we have Liquid aerosols. Write each point on a new line, with the key term first, and explain it in your own words when we revise. When you finish, we go to the next slide.</a:t>
             </a:r>
             <a:endParaRPr lang="en-US" dirty="0"/>
           </a:p>
@@ -3457,7 +3457,7 @@
           <a:p>
             <a:r>
               <a:rPr lang="en-US" dirty="0"/>
-              <a:t>Here is the plan of our lesson today. We shall objectives and recall; then real-life situation and action to take; then learning activities; then board summary; then evaluation, remediation and homework.</a:t>
+              <a:t>Here is the plan of our lesson today. First, we shall look at the objectives and recall what you already know. After that, we shall study a situation from real life and the action to take, and do the learning activities. Finally, we shall copy the board summary, do the evaluation and the remediation, and I will give you the homework.</a:t>
             </a:r>
             <a:endParaRPr lang="en-US" dirty="0"/>
           </a:p>
@@ -3545,7 +3545,7 @@
           <a:p>
             <a:r>
               <a:rPr lang="en-US" dirty="0"/>
-              <a:t>We continue with the same part. Write each point on a new line, with the key term first.</a:t>
+              <a:t>We continue with Aerosols. On this slide we have Solid aerosols. Write each point on a new line, with the key term first, and explain it in your own words when we revise.</a:t>
             </a:r>
             <a:endParaRPr lang="en-US" dirty="0"/>
           </a:p>
@@ -6317,7 +6317,7 @@
                 <a:ea typeface="Times New Roman" pitchFamily="34" charset="-122"/>
                 <a:cs typeface="Times New Roman" pitchFamily="34" charset="-120"/>
               </a:rPr>
-              <a:t>Lesson 1: The Meaning and Composition of the Atmosphere</a:t>
+              <a:t>Lesson 1</a:t>
             </a:r>
             <a:endParaRPr lang="en-US" sz="2600" dirty="0"/>
           </a:p>
